--- a/02-dbscan/slides/Algoritmo de Clustering DBSCAN - UDEM.pptx
+++ b/02-dbscan/slides/Algoritmo de Clustering DBSCAN - UDEM.pptx
@@ -12367,7 +12367,7 @@
                 </a:solidFill>
                 <a:latin typeface="Calibri"/>
               </a:rPr>
-              <a:t>En las lunas, DBSCAN acierta (ARI = 1.0) y K-Means no (ARI = 0.48)… pero la silhouette favorece a K-Means (0.49 vs 0.38): premia grupos redondos. Mira siempre la gráfica.</a:t>
+              <a:t>En las lunas, DBSCAN separa las 2 lunas exactas y K-Means deja 46 de 300 puntos en la luna equivocada… pero la silhouette favorece a K-Means (0.49 vs 0.38): premia grupos redondos. Mira la gráfica.</a:t>
             </a:r>
           </a:p>
         </p:txBody>
